--- a/templates/posts/october/_templates/5-big-number.pptx
+++ b/templates/posts/october/_templates/5-big-number.pptx
@@ -3575,7 +3575,7 @@
     <p:bg>
       <p:bgPr>
         <a:solidFill>
-          <a:srgbClr val="F4F1EA"/>
+          <a:srgbClr val="F3F1EA"/>
         </a:solidFill>
         <a:effectLst/>
       </p:bgPr>
@@ -3617,7 +3617,7 @@
             <a:r>
               <a:rPr sz="20000" b="1" i="0">
                 <a:solidFill>
-                  <a:srgbClr val="156826"/>
+                  <a:srgbClr val="31662F"/>
                 </a:solidFill>
                 <a:latin typeface="Montserrat"/>
               </a:rPr>
@@ -3656,7 +3656,7 @@
             <a:r>
               <a:rPr sz="5600" b="1" i="0">
                 <a:solidFill>
-                  <a:srgbClr val="22371F"/>
+                  <a:srgbClr val="1E3F1D"/>
                 </a:solidFill>
                 <a:latin typeface="Montserrat"/>
               </a:rPr>
@@ -3798,7 +3798,7 @@
     <p:bg>
       <p:bgPr>
         <a:solidFill>
-          <a:srgbClr val="F4F1EA"/>
+          <a:srgbClr val="F3F1EA"/>
         </a:solidFill>
         <a:effectLst/>
       </p:bgPr>
@@ -3825,7 +3825,7 @@
             <a:avLst/>
           </a:prstGeom>
           <a:solidFill>
-            <a:srgbClr val="156826"/>
+            <a:srgbClr val="31662F"/>
           </a:solidFill>
           <a:ln>
             <a:noFill/>
@@ -3884,7 +3884,7 @@
             <a:r>
               <a:rPr sz="7200" b="1" i="0">
                 <a:solidFill>
-                  <a:srgbClr val="156826"/>
+                  <a:srgbClr val="31662F"/>
                 </a:solidFill>
                 <a:latin typeface="Montserrat"/>
               </a:rPr>
@@ -3947,7 +3947,7 @@
             <a:avLst/>
           </a:prstGeom>
           <a:solidFill>
-            <a:srgbClr val="22371F"/>
+            <a:srgbClr val="1E3F1D"/>
           </a:solidFill>
           <a:ln>
             <a:noFill/>
@@ -4006,7 +4006,7 @@
             <a:r>
               <a:rPr sz="7200" b="1" i="0">
                 <a:solidFill>
-                  <a:srgbClr val="22371F"/>
+                  <a:srgbClr val="1E3F1D"/>
                 </a:solidFill>
                 <a:latin typeface="Montserrat"/>
               </a:rPr>
@@ -4069,7 +4069,7 @@
             <a:avLst/>
           </a:prstGeom>
           <a:solidFill>
-            <a:srgbClr val="22371F"/>
+            <a:srgbClr val="1E3F1D"/>
           </a:solidFill>
           <a:ln>
             <a:noFill/>
